--- a/Lecture11_DifferenceinDifferences2/Lecture11_DiD2.pptx
+++ b/Lecture11_DifferenceinDifferences2/Lecture11_DiD2.pptx
@@ -17097,7 +17097,7 @@
               <a:rPr lang="en-US" sz="3600" dirty="0">
                 <a:cs typeface="Times New Roman" panose="02020603050405020304" pitchFamily="18" charset="0"/>
               </a:rPr>
-              <a:t>Results: OH vs. Synthetic OH</a:t>
+              <a:t>Results: Cuba vs. Synthetic Cuba</a:t>
             </a:r>
             <a:endParaRPr lang="en-US" sz="3600" dirty="0">
               <a:latin typeface="Times New Roman" panose="02020603050405020304" pitchFamily="18" charset="0"/>
@@ -17267,7 +17267,7 @@
               <a:rPr lang="en-US" sz="3600" dirty="0">
                 <a:cs typeface="Times New Roman" panose="02020603050405020304" pitchFamily="18" charset="0"/>
               </a:rPr>
-              <a:t>Results: OH vs. Synthetic OH</a:t>
+              <a:t>Results: Cuba vs. Synthetic Cuba</a:t>
             </a:r>
             <a:endParaRPr lang="en-US" sz="3600" dirty="0">
               <a:latin typeface="Times New Roman" panose="02020603050405020304" pitchFamily="18" charset="0"/>

--- a/Lecture11_DifferenceinDifferences2/Lecture11_DiD2.pptx
+++ b/Lecture11_DifferenceinDifferences2/Lecture11_DiD2.pptx
@@ -342,7 +342,7 @@
           <a:p>
             <a:fld id="{EF911157-0FC2-4F06-8D61-FD647FE4E19D}" type="datetimeFigureOut">
               <a:rPr lang="en-US" smtClean="0"/>
-              <a:t>7/22/2026</a:t>
+              <a:t>8/24/2026</a:t>
             </a:fld>
             <a:endParaRPr lang="en-US"/>
           </a:p>
@@ -664,11 +664,11 @@
             </a:pPr>
             <a:r>
               <a:rPr lang="en-US" dirty="0"/>
-              <a:t>You won’t be able to cover all 3 of these this semester, will need to pick (DDD</a:t>
+              <a:t>You won’t be able to cover all 3 of these this semester, will need to pick (DDD, Fadlon Nielsen, SC). Incorporate SC t-tests from this </a:t>
             </a:r>
             <a:r>
               <a:rPr lang="en-US"/>
-              <a:t>, Fadlon Nielsen, SC)</a:t>
+              <a:t>new paper: https://www.journals.uchicago.edu/doi/abs/10.1086/742424?af=R</a:t>
             </a:r>
             <a:endParaRPr lang="en-US" dirty="0"/>
           </a:p>
@@ -5599,7 +5599,7 @@
             <a:fld id="{0972D05C-DCFB-4BB6-B49C-AC126BF3ED2C}" type="datetimeFigureOut">
               <a:rPr lang="en-US" smtClean="0"/>
               <a:pPr/>
-              <a:t>7/22/2026</a:t>
+              <a:t>8/24/2026</a:t>
             </a:fld>
             <a:endParaRPr lang="en-US"/>
           </a:p>
@@ -5836,7 +5836,7 @@
             <a:fld id="{0972D05C-DCFB-4BB6-B49C-AC126BF3ED2C}" type="datetimeFigureOut">
               <a:rPr lang="en-US" smtClean="0"/>
               <a:pPr/>
-              <a:t>7/22/2026</a:t>
+              <a:t>8/24/2026</a:t>
             </a:fld>
             <a:endParaRPr lang="en-US"/>
           </a:p>
@@ -6018,7 +6018,7 @@
             <a:fld id="{0972D05C-DCFB-4BB6-B49C-AC126BF3ED2C}" type="datetimeFigureOut">
               <a:rPr lang="en-US" smtClean="0"/>
               <a:pPr/>
-              <a:t>7/22/2026</a:t>
+              <a:t>8/24/2026</a:t>
             </a:fld>
             <a:endParaRPr lang="en-US"/>
           </a:p>
@@ -6190,7 +6190,7 @@
             <a:fld id="{0972D05C-DCFB-4BB6-B49C-AC126BF3ED2C}" type="datetimeFigureOut">
               <a:rPr lang="en-US" smtClean="0"/>
               <a:pPr/>
-              <a:t>7/22/2026</a:t>
+              <a:t>8/24/2026</a:t>
             </a:fld>
             <a:endParaRPr lang="en-US"/>
           </a:p>
@@ -6446,7 +6446,7 @@
             <a:fld id="{0972D05C-DCFB-4BB6-B49C-AC126BF3ED2C}" type="datetimeFigureOut">
               <a:rPr lang="en-US" smtClean="0"/>
               <a:pPr/>
-              <a:t>7/22/2026</a:t>
+              <a:t>8/24/2026</a:t>
             </a:fld>
             <a:endParaRPr lang="en-US"/>
           </a:p>
@@ -6774,7 +6774,7 @@
             <a:fld id="{0972D05C-DCFB-4BB6-B49C-AC126BF3ED2C}" type="datetimeFigureOut">
               <a:rPr lang="en-US" smtClean="0"/>
               <a:pPr/>
-              <a:t>7/22/2026</a:t>
+              <a:t>8/24/2026</a:t>
             </a:fld>
             <a:endParaRPr lang="en-US"/>
           </a:p>
@@ -7227,7 +7227,7 @@
             <a:fld id="{0972D05C-DCFB-4BB6-B49C-AC126BF3ED2C}" type="datetimeFigureOut">
               <a:rPr lang="en-US" smtClean="0"/>
               <a:pPr/>
-              <a:t>7/22/2026</a:t>
+              <a:t>8/24/2026</a:t>
             </a:fld>
             <a:endParaRPr lang="en-US"/>
           </a:p>
@@ -7347,7 +7347,7 @@
             <a:fld id="{0972D05C-DCFB-4BB6-B49C-AC126BF3ED2C}" type="datetimeFigureOut">
               <a:rPr lang="en-US" smtClean="0"/>
               <a:pPr/>
-              <a:t>7/22/2026</a:t>
+              <a:t>8/24/2026</a:t>
             </a:fld>
             <a:endParaRPr lang="en-US"/>
           </a:p>
@@ -7444,7 +7444,7 @@
             <a:fld id="{0972D05C-DCFB-4BB6-B49C-AC126BF3ED2C}" type="datetimeFigureOut">
               <a:rPr lang="en-US" smtClean="0"/>
               <a:pPr/>
-              <a:t>7/22/2026</a:t>
+              <a:t>8/24/2026</a:t>
             </a:fld>
             <a:endParaRPr lang="en-US"/>
           </a:p>
@@ -7733,7 +7733,7 @@
             <a:fld id="{0972D05C-DCFB-4BB6-B49C-AC126BF3ED2C}" type="datetimeFigureOut">
               <a:rPr lang="en-US" smtClean="0"/>
               <a:pPr/>
-              <a:t>7/22/2026</a:t>
+              <a:t>8/24/2026</a:t>
             </a:fld>
             <a:endParaRPr lang="en-US"/>
           </a:p>
@@ -8057,7 +8057,7 @@
             <a:fld id="{0972D05C-DCFB-4BB6-B49C-AC126BF3ED2C}" type="datetimeFigureOut">
               <a:rPr lang="en-US" smtClean="0"/>
               <a:pPr/>
-              <a:t>7/22/2026</a:t>
+              <a:t>8/24/2026</a:t>
             </a:fld>
             <a:endParaRPr lang="en-US"/>
           </a:p>
@@ -8319,7 +8319,7 @@
             <a:fld id="{0972D05C-DCFB-4BB6-B49C-AC126BF3ED2C}" type="datetimeFigureOut">
               <a:rPr lang="en-US" smtClean="0"/>
               <a:pPr/>
-              <a:t>7/22/2026</a:t>
+              <a:t>8/24/2026</a:t>
             </a:fld>
             <a:endParaRPr lang="en-US" dirty="0"/>
           </a:p>
@@ -11911,10 +11911,7 @@
                 </a:pPr>
                 <a14:m>
                   <m:oMathPara xmlns:m="http://schemas.openxmlformats.org/officeDocument/2006/math">
-                    <m:oMathParaPr>
-                      <m:jc m:val="centerGroup"/>
-                    </m:oMathParaPr>
-                    <m:oMath xmlns:m="http://schemas.openxmlformats.org/officeDocument/2006/math">
+                    <m:oMath>
                       <m:sSub>
                         <m:sSubPr>
                           <m:ctrlPr>
@@ -12326,10 +12323,7 @@
                 </a:pPr>
                 <a14:m>
                   <m:oMathPara xmlns:m="http://schemas.openxmlformats.org/officeDocument/2006/math">
-                    <m:oMathParaPr>
-                      <m:jc m:val="centerGroup"/>
-                    </m:oMathParaPr>
-                    <m:oMath xmlns:m="http://schemas.openxmlformats.org/officeDocument/2006/math">
+                    <m:oMath>
                       <m:sSub>
                         <m:sSubPr>
                           <m:ctrlPr>
@@ -16085,10 +16079,7 @@
                 </a:pPr>
                 <a14:m>
                   <m:oMathPara xmlns:m="http://schemas.openxmlformats.org/officeDocument/2006/math">
-                    <m:oMathParaPr>
-                      <m:jc m:val="centerGroup"/>
-                    </m:oMathParaPr>
-                    <m:oMath xmlns:m="http://schemas.openxmlformats.org/officeDocument/2006/math">
+                    <m:oMath>
                       <m:func>
                         <m:funcPr>
                           <m:ctrlPr>
@@ -16102,7 +16093,7 @@
                           <m:sSubSup>
                             <m:sSubSupPr>
                               <m:ctrlPr>
-                                <a:rPr lang="en-US" sz="2400" b="0" i="1" smtClean="0">
+                                <a:rPr lang="en-US" sz="2400" b="0" i="0" smtClean="0">
                                   <a:latin typeface="Cambria Math" panose="02040503050406030204" pitchFamily="18" charset="0"/>
                                   <a:cs typeface="Times New Roman" panose="02020603050405020304" pitchFamily="18" charset="0"/>
                                 </a:rPr>
@@ -16305,7 +16296,7 @@
                       <m:sSub>
                         <m:sSubPr>
                           <m:ctrlPr>
-                            <a:rPr lang="en-US" sz="2400" b="0" i="1" smtClean="0">
+                            <a:rPr lang="en-US" sz="2400" b="0" i="0" smtClean="0">
                               <a:latin typeface="Cambria Math" panose="02040503050406030204" pitchFamily="18" charset="0"/>
                               <a:cs typeface="Times New Roman" panose="02020603050405020304" pitchFamily="18" charset="0"/>
                             </a:rPr>
@@ -16423,10 +16414,7 @@
                 </a:pPr>
                 <a14:m>
                   <m:oMathPara xmlns:m="http://schemas.openxmlformats.org/officeDocument/2006/math">
-                    <m:oMathParaPr>
-                      <m:jc m:val="centerGroup"/>
-                    </m:oMathParaPr>
-                    <m:oMath xmlns:m="http://schemas.openxmlformats.org/officeDocument/2006/math">
+                    <m:oMath>
                       <m:sSub>
                         <m:sSubPr>
                           <m:ctrlPr>
@@ -18989,10 +18977,7 @@
                 </a:pPr>
                 <a14:m>
                   <m:oMathPara xmlns:m="http://schemas.openxmlformats.org/officeDocument/2006/math">
-                    <m:oMathParaPr>
-                      <m:jc m:val="centerGroup"/>
-                    </m:oMathParaPr>
-                    <m:oMath xmlns:m="http://schemas.openxmlformats.org/officeDocument/2006/math">
+                    <m:oMath>
                       <m:sSub>
                         <m:sSubPr>
                           <m:ctrlPr>
@@ -19147,10 +19132,7 @@
                 </a:pPr>
                 <a14:m>
                   <m:oMathPara xmlns:m="http://schemas.openxmlformats.org/officeDocument/2006/math">
-                    <m:oMathParaPr>
-                      <m:jc m:val="centerGroup"/>
-                    </m:oMathParaPr>
-                    <m:oMath xmlns:m="http://schemas.openxmlformats.org/officeDocument/2006/math">
+                    <m:oMath>
                       <m:sSub>
                         <m:sSubPr>
                           <m:ctrlPr>
@@ -19537,10 +19519,7 @@
                 </a:pPr>
                 <a14:m>
                   <m:oMathPara xmlns:m="http://schemas.openxmlformats.org/officeDocument/2006/math">
-                    <m:oMathParaPr>
-                      <m:jc m:val="centerGroup"/>
-                    </m:oMathParaPr>
-                    <m:oMath xmlns:m="http://schemas.openxmlformats.org/officeDocument/2006/math">
+                    <m:oMath>
                       <m:r>
                         <a:rPr lang="en-US" sz="2400" b="0" i="1" smtClean="0">
                           <a:latin typeface="Cambria Math" panose="02040503050406030204" pitchFamily="18" charset="0"/>
